--- a/library/seminars/sem-06/rendered/sem-06-n40.pptx
+++ b/library/seminars/sem-06/rendered/sem-06-n40.pptx
@@ -508,43 +508,43 @@
           <a:p/>
           <a:p>
             <a:r>
-              <a:t>Прочитать самому: полный контроль над тем, что и в каком порядке читается, но окно сессии занимает содержимое сорока файлов, из которых для ответа нужен один вывод. Коллега: единственный вариант, способный ответить за минуту, и единственный, который зависит от чужого расписания. Субагент в своём окне: сорок файлов открываются и закрываются там, обратно приходит только итог. Скилл: пригодится при повторении, но при первом запуске читает те же файлы тем же способом в той же сессии. По памяти: мгновенно, проверки нет, а вопрос был именно про проверку.</a:t>
+              <a:t>Прочитать самому: полный контроль над порядком чтения, но контекст сессии занимает содержимое сорока файлов, из которых для правки нужны четыре. Вторая сессия: рабочий контекст остаётся чистым, и это правда — но список придётся переносить руками, а править агент будет по вашему пересказу. Условие про старые аккаунты выпадает из пересказа первым. Коллега: единственный вариант, способный ответить за минуту, и единственный, который зависит от чужого расписания. Роль: сорок файлов открываются и закрываются в её контексте, список приходит обратно сам. По памяти: мгновенно, но четвёртое место помнит не всякий из тех, кто его писал.</a:t>
             </a:r>
           </a:p>
           <a:p/>
           <a:p>
             <a:r>
-              <a:t>Теперь про «быстрее». Роль открывает все сорок файлов и читает их целиком. Двадцать минут чтения из сцены остаются двадцатью минутами: ни одна строчка не читается быстрее оттого, что её читает другой процесс.</a:t>
+              <a:t>Теперь про «быстрее». Роль открывает все сорок файлов и читает их целиком. Двадцать минут чтения остаются двадцатью минутами: ни одна строчка не читается быстрее оттого, что её читает другой процесс.</a:t>
             </a:r>
           </a:p>
           <a:p/>
           <a:p>
             <a:r>
-              <a:t>Выигрыш лежит в другом месте. Сорок файлов остаются в окне роли, и это окно закрывается вместе с ней. В сессию возвращается строка ответа — и то самое место, которого в сцене не хватило на собственную правку.</a:t>
+              <a:t>Выигрыш лежит в двух других местах. Чтение остаётся в контексте роли, и этот контекст закрывается вместе с ней. А список возвращается туда, где лежит правка, — сам, без вашего пересказа. Вторая сессия даёт только первое из двух.</a:t>
             </a:r>
           </a:p>
           <a:p/>
           <a:p>
             <a:r>
-              <a:t>Если спросят, зачем тогда вообще заводить роль, если время то же самое: ради того, что останется доступно дальше в этой же сессии. Двадцать минут чтения в сцене ушли на дело: ответ техническому директору был нужен. Час на повторное объяснение правки можно было не тратить вовсе, и экономит роль именно его. Механика разделения — на одностраничнике «Роль целиком» в начале ступени, блоки третий и четвёртый: что входит в окно роли и что уходит обратно.</a:t>
+              <a:t>Если спросят, зачем тогда вообще заводить роль, если время то же самое: ради того, что останется доступно дальше в этой же сессии. Двадцать минут чтения ушли на дело — список был нужен. Полчаса на повторное объяснение можно было не тратить вовсе, и экономит роль именно их. Механика разделения — на схеме базы ступени и на одностраничнике «Роль целиком», блоки третий и четвёртый.</a:t>
             </a:r>
           </a:p>
           <a:p/>
           <a:p>
             <a:r>
-              <a:t>Если прозвучит «а если запустить несколько ролей разом, тогда быстрее?»: тогда да, и это следующий кейс ступени целиком. Но быстрее там становится очередь из нескольких независимых задач; чтение одного вопроса остаётся тем же. Для одного вопроса из сорока файлов выигрыша по времени нет ни при каком числе ролей.</a:t>
+              <a:t>Если прозвучит «пересказ — ерунда, я просто скопирую ответ целиком»: тогда вы скопируете в рабочий контекст ровно то, от чего уходили, плюс потратите своё время на передачу. Чем короче то, что вы переносите, тем больше в нём потеряно; чем длиннее — тем меньше смысла было уносить чтение.</a:t>
             </a:r>
           </a:p>
           <a:p/>
           <a:p>
             <a:r>
+              <a:t>Если прозвучит «а если запустить несколько ролей разом, тогда быстрее?»: тогда да, и это следующий кейс ступени целиком. Но быстрее там становится очередь из нескольких независимых задач; чтение одного вопроса остаётся тем же. Для одного поиска по сорока файлам выигрыша по времени нет ни при каком числе ролей.</a:t>
+            </a:r>
+          </a:p>
+          <a:p/>
+          <a:p>
+            <a:r>
               <a:t>Если спросят, почему коллега вынесен в отдельную строку, если это не инструмент: потому что в жизни он первый кандидат и часто правильный. Строка нужна, чтобы это было сказано вслух: иначе вариант выглядит забытым.</a:t>
-            </a:r>
-          </a:p>
-          <a:p/>
-          <a:p>
-            <a:r>
-              <a:t>Если спросят про скилл: он решает повторяемость, не объём чтения. Записанный вопрос запускается тем же способом и в той же сессии, пока делегирование не заведено отдельно; эти два приёма складываются, и в третьем кейсе мы увидим, как именно.</a:t>
             </a:r>
           </a:p>
         </p:txBody>
@@ -3609,11 +3609,11 @@
         <p:spPr>
           <a:xfrm>
             <a:off x="502920" y="943356"/>
-            <a:ext cx="11183112" cy="3749166"/>
+            <a:ext cx="11183112" cy="3990149"/>
           </a:xfrm>
           <a:prstGeom prst="roundRect">
             <a:avLst>
-              <a:gd name="adj" fmla="val 8129"/>
+              <a:gd name="adj" fmla="val 7638"/>
             </a:avLst>
           </a:prstGeom>
           <a:solidFill>
@@ -3657,7 +3657,7 @@
         <p:spPr>
           <a:xfrm>
             <a:off x="685800" y="1126236"/>
-            <a:ext cx="1433359" cy="282067"/>
+            <a:ext cx="999024" cy="282067"/>
           </a:xfrm>
           <a:prstGeom prst="rect">
             <a:avLst/>
@@ -3698,8 +3698,8 @@
         </p:nvSpPr>
         <p:spPr>
           <a:xfrm>
-            <a:off x="2265463" y="1126236"/>
-            <a:ext cx="3570177" cy="282067"/>
+            <a:off x="1831128" y="1126236"/>
+            <a:ext cx="3713726" cy="282067"/>
           </a:xfrm>
           <a:prstGeom prst="rect">
             <a:avLst/>
@@ -3740,8 +3740,8 @@
         </p:nvSpPr>
         <p:spPr>
           <a:xfrm>
-            <a:off x="5981945" y="1126236"/>
-            <a:ext cx="5374902" cy="282067"/>
+            <a:off x="5691158" y="1126236"/>
+            <a:ext cx="5665689" cy="282067"/>
           </a:xfrm>
           <a:prstGeom prst="rect">
             <a:avLst/>
@@ -3783,7 +3783,7 @@
         <p:spPr>
           <a:xfrm>
             <a:off x="685800" y="1408303"/>
-            <a:ext cx="1433359" cy="690371"/>
+            <a:ext cx="999024" cy="836422"/>
           </a:xfrm>
           <a:prstGeom prst="rect">
             <a:avLst/>
@@ -3798,14 +3798,14 @@
           <a:p>
             <a:pPr algn="l">
               <a:lnSpc>
-                <a:spcPts val="1380"/>
+                <a:spcPts val="1322"/>
               </a:lnSpc>
               <a:spcAft>
                 <a:spcPts val="0"/>
               </a:spcAft>
             </a:pPr>
             <a:r>
-              <a:rPr sz="1200" b="0" i="0">
+              <a:rPr sz="1150" b="0" i="0">
                 <a:solidFill>
                   <a:srgbClr val="141B2E"/>
                 </a:solidFill>
@@ -3824,8 +3824,8 @@
         </p:nvSpPr>
         <p:spPr>
           <a:xfrm>
-            <a:off x="2265463" y="1408303"/>
-            <a:ext cx="3570177" cy="690371"/>
+            <a:off x="1831128" y="1408303"/>
+            <a:ext cx="3713726" cy="836422"/>
           </a:xfrm>
           <a:prstGeom prst="rect">
             <a:avLst/>
@@ -3840,14 +3840,14 @@
           <a:p>
             <a:pPr algn="l">
               <a:lnSpc>
-                <a:spcPts val="1380"/>
+                <a:spcPts val="1322"/>
               </a:lnSpc>
               <a:spcAft>
                 <a:spcPts val="0"/>
               </a:spcAft>
             </a:pPr>
             <a:r>
-              <a:rPr sz="1200" b="0" i="0">
+              <a:rPr sz="1150" b="0" i="0">
                 <a:solidFill>
                   <a:srgbClr val="141B2E"/>
                 </a:solidFill>
@@ -3866,8 +3866,8 @@
         </p:nvSpPr>
         <p:spPr>
           <a:xfrm>
-            <a:off x="5981945" y="1408303"/>
-            <a:ext cx="5374902" cy="690371"/>
+            <a:off x="5691158" y="1408303"/>
+            <a:ext cx="5665689" cy="836422"/>
           </a:xfrm>
           <a:prstGeom prst="rect">
             <a:avLst/>
@@ -3882,20 +3882,20 @@
           <a:p>
             <a:pPr algn="l">
               <a:lnSpc>
-                <a:spcPts val="1380"/>
+                <a:spcPts val="1322"/>
               </a:lnSpc>
               <a:spcAft>
                 <a:spcPts val="0"/>
               </a:spcAft>
             </a:pPr>
             <a:r>
-              <a:rPr sz="1200" b="0" i="0">
+              <a:rPr sz="1150" b="0" i="0">
                 <a:solidFill>
                   <a:srgbClr val="141B2E"/>
                 </a:solidFill>
                 <a:latin typeface="Arial"/>
               </a:rPr>
-              <a:t>окно сессии занимает содержимое сорока файлов, из которых для ответа нужен один вывод</a:t>
+              <a:t>контекст сессии занимает содержимое сорока файлов, из которых для правки нужны четыре</a:t>
             </a:r>
           </a:p>
         </p:txBody>
@@ -3908,7 +3908,7 @@
         </p:nvCxnSpPr>
         <p:spPr>
           <a:xfrm>
-            <a:off x="685800" y="2098675"/>
+            <a:off x="685800" y="2244725"/>
             <a:ext cx="10817352" cy="0"/>
           </a:xfrm>
           <a:prstGeom prst="line">
@@ -3943,8 +3943,8 @@
         </p:nvSpPr>
         <p:spPr>
           <a:xfrm>
-            <a:off x="685800" y="2098675"/>
-            <a:ext cx="1433359" cy="690371"/>
+            <a:off x="685800" y="2244725"/>
+            <a:ext cx="999024" cy="668464"/>
           </a:xfrm>
           <a:prstGeom prst="rect">
             <a:avLst/>
@@ -3959,20 +3959,20 @@
           <a:p>
             <a:pPr algn="l">
               <a:lnSpc>
-                <a:spcPts val="1380"/>
+                <a:spcPts val="1322"/>
               </a:lnSpc>
               <a:spcAft>
                 <a:spcPts val="0"/>
               </a:spcAft>
             </a:pPr>
             <a:r>
-              <a:rPr sz="1200" b="0" i="0">
+              <a:rPr sz="1150" b="0" i="0">
                 <a:solidFill>
                   <a:srgbClr val="141B2E"/>
                 </a:solidFill>
                 <a:latin typeface="Arial"/>
               </a:rPr>
-              <a:t>позвать коллегу</a:t>
+              <a:t>вторая сессия</a:t>
             </a:r>
           </a:p>
         </p:txBody>
@@ -3985,8 +3985,8 @@
         </p:nvSpPr>
         <p:spPr>
           <a:xfrm>
-            <a:off x="2265463" y="2098675"/>
-            <a:ext cx="3570177" cy="690371"/>
+            <a:off x="1831128" y="2244725"/>
+            <a:ext cx="3713726" cy="668464"/>
           </a:xfrm>
           <a:prstGeom prst="rect">
             <a:avLst/>
@@ -4001,20 +4001,20 @@
           <a:p>
             <a:pPr algn="l">
               <a:lnSpc>
-                <a:spcPts val="1380"/>
+                <a:spcPts val="1322"/>
               </a:lnSpc>
               <a:spcAft>
                 <a:spcPts val="0"/>
               </a:spcAft>
             </a:pPr>
             <a:r>
-              <a:rPr sz="1200" b="0" i="0">
+              <a:rPr sz="1150" b="0" i="0">
                 <a:solidFill>
                   <a:srgbClr val="141B2E"/>
                 </a:solidFill>
                 <a:latin typeface="Arial"/>
               </a:rPr>
-              <a:t>единственный вариант, который может ответить за минуту — если коллега свеж в теме</a:t>
+              <a:t>рабочий контекст остаётся чистым: сорок файлов ложатся в чужой</a:t>
             </a:r>
           </a:p>
         </p:txBody>
@@ -4027,8 +4027,8 @@
         </p:nvSpPr>
         <p:spPr>
           <a:xfrm>
-            <a:off x="5981945" y="2098675"/>
-            <a:ext cx="5374902" cy="690371"/>
+            <a:off x="5691158" y="2244725"/>
+            <a:ext cx="5665689" cy="668464"/>
           </a:xfrm>
           <a:prstGeom prst="rect">
             <a:avLst/>
@@ -4043,20 +4043,20 @@
           <a:p>
             <a:pPr algn="l">
               <a:lnSpc>
-                <a:spcPts val="1380"/>
+                <a:spcPts val="1322"/>
               </a:lnSpc>
               <a:spcAft>
                 <a:spcPts val="0"/>
               </a:spcAft>
             </a:pPr>
             <a:r>
-              <a:rPr sz="1200" b="0" i="0">
+              <a:rPr sz="1150" b="0" i="0">
                 <a:solidFill>
                   <a:srgbClr val="141B2E"/>
                 </a:solidFill>
                 <a:latin typeface="Arial"/>
               </a:rPr>
-              <a:t>единственный вариант, который зависит от чужого расписания: решает, свободен ли человек прямо сейчас</a:t>
+              <a:t>список придётся переносить руками, и править агент будет по вашему пересказу — условие про старые аккаунты выпадает из пересказа первым</a:t>
             </a:r>
           </a:p>
         </p:txBody>
@@ -4069,7 +4069,7 @@
         </p:nvCxnSpPr>
         <p:spPr>
           <a:xfrm>
-            <a:off x="685800" y="2789047"/>
+            <a:off x="685800" y="2913189"/>
             <a:ext cx="10817352" cy="0"/>
           </a:xfrm>
           <a:prstGeom prst="line">
@@ -4104,8 +4104,8 @@
         </p:nvSpPr>
         <p:spPr>
           <a:xfrm>
-            <a:off x="685800" y="2789047"/>
-            <a:ext cx="1433359" cy="690371"/>
+            <a:off x="685800" y="2913189"/>
+            <a:ext cx="999024" cy="668464"/>
           </a:xfrm>
           <a:prstGeom prst="rect">
             <a:avLst/>
@@ -4120,20 +4120,20 @@
           <a:p>
             <a:pPr algn="l">
               <a:lnSpc>
-                <a:spcPts val="1380"/>
+                <a:spcPts val="1322"/>
               </a:lnSpc>
               <a:spcAft>
                 <a:spcPts val="0"/>
               </a:spcAft>
             </a:pPr>
             <a:r>
-              <a:rPr sz="1200" b="0" i="0">
+              <a:rPr sz="1150" b="0" i="0">
                 <a:solidFill>
                   <a:srgbClr val="141B2E"/>
                 </a:solidFill>
                 <a:latin typeface="Arial"/>
               </a:rPr>
-              <a:t>субагент читает в своём окне</a:t>
+              <a:t>позвать коллегу</a:t>
             </a:r>
           </a:p>
         </p:txBody>
@@ -4146,8 +4146,8 @@
         </p:nvSpPr>
         <p:spPr>
           <a:xfrm>
-            <a:off x="2265463" y="2789047"/>
-            <a:ext cx="3570177" cy="690371"/>
+            <a:off x="1831128" y="2913189"/>
+            <a:ext cx="3713726" cy="668464"/>
           </a:xfrm>
           <a:prstGeom prst="rect">
             <a:avLst/>
@@ -4162,20 +4162,20 @@
           <a:p>
             <a:pPr algn="l">
               <a:lnSpc>
-                <a:spcPts val="1380"/>
+                <a:spcPts val="1322"/>
               </a:lnSpc>
               <a:spcAft>
                 <a:spcPts val="0"/>
               </a:spcAft>
             </a:pPr>
             <a:r>
-              <a:rPr sz="1200" b="0" i="0">
+              <a:rPr sz="1150" b="0" i="0">
                 <a:solidFill>
                   <a:srgbClr val="141B2E"/>
                 </a:solidFill>
                 <a:latin typeface="Arial"/>
               </a:rPr>
-              <a:t>сорок файлов открываются и закрываются в отдельном, одноразовом окне; обратно приходит только итог</a:t>
+              <a:t>единственный вариант, который может ответить за минуту — если коллега свеж в теме</a:t>
             </a:r>
           </a:p>
         </p:txBody>
@@ -4188,8 +4188,8 @@
         </p:nvSpPr>
         <p:spPr>
           <a:xfrm>
-            <a:off x="5981945" y="2789047"/>
-            <a:ext cx="5374902" cy="690371"/>
+            <a:off x="5691158" y="2913189"/>
+            <a:ext cx="5665689" cy="668464"/>
           </a:xfrm>
           <a:prstGeom prst="rect">
             <a:avLst/>
@@ -4204,20 +4204,20 @@
           <a:p>
             <a:pPr algn="l">
               <a:lnSpc>
-                <a:spcPts val="1380"/>
+                <a:spcPts val="1322"/>
               </a:lnSpc>
               <a:spcAft>
                 <a:spcPts val="0"/>
               </a:spcAft>
             </a:pPr>
             <a:r>
-              <a:rPr sz="1200" b="0" i="0">
+              <a:rPr sz="1150" b="0" i="0">
                 <a:solidFill>
                   <a:srgbClr val="141B2E"/>
                 </a:solidFill>
                 <a:latin typeface="Arial"/>
               </a:rPr>
-              <a:t>быстрее не становится: роль открывает и читает все сорок файлов, время чтения то же</a:t>
+              <a:t>единственный вариант, который зависит от чужого расписания: решает, свободен ли человек прямо сейчас</a:t>
             </a:r>
           </a:p>
         </p:txBody>
@@ -4230,7 +4230,7 @@
         </p:nvCxnSpPr>
         <p:spPr>
           <a:xfrm>
-            <a:off x="685800" y="3479418"/>
+            <a:off x="685800" y="3581654"/>
             <a:ext cx="10817352" cy="0"/>
           </a:xfrm>
           <a:prstGeom prst="line">
@@ -4265,8 +4265,8 @@
         </p:nvSpPr>
         <p:spPr>
           <a:xfrm>
-            <a:off x="685800" y="3479418"/>
-            <a:ext cx="1433359" cy="515111"/>
+            <a:off x="685800" y="3581654"/>
+            <a:ext cx="999024" cy="668464"/>
           </a:xfrm>
           <a:prstGeom prst="rect">
             <a:avLst/>
@@ -4281,20 +4281,20 @@
           <a:p>
             <a:pPr algn="l">
               <a:lnSpc>
-                <a:spcPts val="1380"/>
+                <a:spcPts val="1322"/>
               </a:lnSpc>
               <a:spcAft>
                 <a:spcPts val="0"/>
               </a:spcAft>
             </a:pPr>
             <a:r>
-              <a:rPr sz="1200" b="0" i="0">
+              <a:rPr sz="1150" b="0" i="0">
                 <a:solidFill>
                   <a:srgbClr val="141B2E"/>
                 </a:solidFill>
                 <a:latin typeface="Arial"/>
               </a:rPr>
-              <a:t>сохранить вопрос как скилл</a:t>
+              <a:t>поручить роли</a:t>
             </a:r>
           </a:p>
         </p:txBody>
@@ -4307,8 +4307,8 @@
         </p:nvSpPr>
         <p:spPr>
           <a:xfrm>
-            <a:off x="2265463" y="3479418"/>
-            <a:ext cx="3570177" cy="515111"/>
+            <a:off x="1831128" y="3581654"/>
+            <a:ext cx="3713726" cy="668464"/>
           </a:xfrm>
           <a:prstGeom prst="rect">
             <a:avLst/>
@@ -4323,20 +4323,20 @@
           <a:p>
             <a:pPr algn="l">
               <a:lnSpc>
-                <a:spcPts val="1380"/>
+                <a:spcPts val="1322"/>
               </a:lnSpc>
               <a:spcAft>
                 <a:spcPts val="0"/>
               </a:spcAft>
             </a:pPr>
             <a:r>
-              <a:rPr sz="1200" b="0" i="0">
+              <a:rPr sz="1150" b="0" i="0">
                 <a:solidFill>
                   <a:srgbClr val="141B2E"/>
                 </a:solidFill>
                 <a:latin typeface="Arial"/>
               </a:rPr>
-              <a:t>пригодится, если тот же вопрос прозвучит снова</a:t>
+              <a:t>сорок файлов открываются и закрываются в отдельном, одноразовом контексте; список приходит обратно сам, в ту же сессию</a:t>
             </a:r>
           </a:p>
         </p:txBody>
@@ -4349,8 +4349,8 @@
         </p:nvSpPr>
         <p:spPr>
           <a:xfrm>
-            <a:off x="5981945" y="3479418"/>
-            <a:ext cx="5374902" cy="515111"/>
+            <a:off x="5691158" y="3581654"/>
+            <a:ext cx="5665689" cy="668464"/>
           </a:xfrm>
           <a:prstGeom prst="rect">
             <a:avLst/>
@@ -4365,20 +4365,20 @@
           <a:p>
             <a:pPr algn="l">
               <a:lnSpc>
-                <a:spcPts val="1380"/>
+                <a:spcPts val="1322"/>
               </a:lnSpc>
               <a:spcAft>
                 <a:spcPts val="0"/>
               </a:spcAft>
             </a:pPr>
             <a:r>
-              <a:rPr sz="1200" b="0" i="0">
+              <a:rPr sz="1150" b="0" i="0">
                 <a:solidFill>
                   <a:srgbClr val="141B2E"/>
                 </a:solidFill>
                 <a:latin typeface="Arial"/>
               </a:rPr>
-              <a:t>при первом запуске читает те же файлы тем же способом, в той же сессии, если делегирование не заведено отдельно</a:t>
+              <a:t>быстрее не становится: роль открывает и читает все сорок файлов, время чтения то же</a:t>
             </a:r>
           </a:p>
         </p:txBody>
@@ -4391,7 +4391,7 @@
         </p:nvCxnSpPr>
         <p:spPr>
           <a:xfrm>
-            <a:off x="685800" y="3994530"/>
+            <a:off x="685800" y="4250118"/>
             <a:ext cx="10817352" cy="0"/>
           </a:xfrm>
           <a:prstGeom prst="line">
@@ -4426,8 +4426,8 @@
         </p:nvSpPr>
         <p:spPr>
           <a:xfrm>
-            <a:off x="685800" y="3994530"/>
-            <a:ext cx="1433359" cy="515111"/>
+            <a:off x="685800" y="4250118"/>
+            <a:ext cx="999024" cy="500506"/>
           </a:xfrm>
           <a:prstGeom prst="rect">
             <a:avLst/>
@@ -4442,20 +4442,20 @@
           <a:p>
             <a:pPr algn="l">
               <a:lnSpc>
-                <a:spcPts val="1380"/>
+                <a:spcPts val="1322"/>
               </a:lnSpc>
               <a:spcAft>
                 <a:spcPts val="0"/>
               </a:spcAft>
             </a:pPr>
             <a:r>
-              <a:rPr sz="1200" b="0" i="0">
+              <a:rPr sz="1150" b="0" i="0">
                 <a:solidFill>
                   <a:srgbClr val="141B2E"/>
                 </a:solidFill>
                 <a:latin typeface="Arial"/>
               </a:rPr>
-              <a:t>ответить по памяти</a:t>
+              <a:t>править по памяти</a:t>
             </a:r>
           </a:p>
         </p:txBody>
@@ -4468,8 +4468,8 @@
         </p:nvSpPr>
         <p:spPr>
           <a:xfrm>
-            <a:off x="2265463" y="3994530"/>
-            <a:ext cx="3570177" cy="515111"/>
+            <a:off x="1831128" y="4250118"/>
+            <a:ext cx="3713726" cy="500506"/>
           </a:xfrm>
           <a:prstGeom prst="rect">
             <a:avLst/>
@@ -4484,14 +4484,14 @@
           <a:p>
             <a:pPr algn="l">
               <a:lnSpc>
-                <a:spcPts val="1380"/>
+                <a:spcPts val="1322"/>
               </a:lnSpc>
               <a:spcAft>
                 <a:spcPts val="0"/>
               </a:spcAft>
             </a:pPr>
             <a:r>
-              <a:rPr sz="1200" b="0" i="0">
+              <a:rPr sz="1150" b="0" i="0">
                 <a:solidFill>
                   <a:srgbClr val="141B2E"/>
                 </a:solidFill>
@@ -4510,8 +4510,8 @@
         </p:nvSpPr>
         <p:spPr>
           <a:xfrm>
-            <a:off x="5981945" y="3994530"/>
-            <a:ext cx="5374902" cy="515111"/>
+            <a:off x="5691158" y="4250118"/>
+            <a:ext cx="5665689" cy="500506"/>
           </a:xfrm>
           <a:prstGeom prst="rect">
             <a:avLst/>
@@ -4526,20 +4526,20 @@
           <a:p>
             <a:pPr algn="l">
               <a:lnSpc>
-                <a:spcPts val="1380"/>
+                <a:spcPts val="1322"/>
               </a:lnSpc>
               <a:spcAft>
                 <a:spcPts val="0"/>
               </a:spcAft>
             </a:pPr>
             <a:r>
-              <a:rPr sz="1200" b="0" i="0">
+              <a:rPr sz="1150" b="0" i="0">
                 <a:solidFill>
                   <a:srgbClr val="141B2E"/>
                 </a:solidFill>
                 <a:latin typeface="Arial"/>
               </a:rPr>
-              <a:t>проверки нет, а вопрос именно про проверку</a:t>
+              <a:t>четвёртое место — клиентскую проверку — помнит не всякий из тех, кто её писал</a:t>
             </a:r>
           </a:p>
         </p:txBody>
@@ -4552,8 +4552,8 @@
         </p:nvSpPr>
         <p:spPr>
           <a:xfrm>
-            <a:off x="502920" y="4857114"/>
-            <a:ext cx="82296" cy="959358"/>
+            <a:off x="502920" y="5098097"/>
+            <a:ext cx="82296" cy="1124712"/>
           </a:xfrm>
           <a:prstGeom prst="roundRect">
             <a:avLst>
@@ -4598,8 +4598,8 @@
         </p:nvSpPr>
         <p:spPr>
           <a:xfrm>
-            <a:off x="859536" y="4985130"/>
-            <a:ext cx="10643616" cy="703326"/>
+            <a:off x="859536" y="5226113"/>
+            <a:ext cx="10643616" cy="868680"/>
           </a:xfrm>
           <a:prstGeom prst="rect">
             <a:avLst/>
@@ -4614,14 +4614,14 @@
           <a:p>
             <a:pPr algn="l">
               <a:lnSpc>
-                <a:spcPts val="1798"/>
+                <a:spcPts val="1673"/>
               </a:lnSpc>
               <a:spcAft>
                 <a:spcPts val="300"/>
               </a:spcAft>
             </a:pPr>
             <a:r>
-              <a:rPr sz="1450" b="1" i="0">
+              <a:rPr sz="1350" b="1" i="0">
                 <a:solidFill>
                   <a:srgbClr val="141B2E"/>
                 </a:solidFill>
@@ -4630,13 +4630,13 @@
               <a:t>Вывод.</a:t>
             </a:r>
             <a:r>
-              <a:rPr sz="1450" b="1" i="0">
+              <a:rPr sz="1350" b="1" i="0">
                 <a:solidFill>
                   <a:srgbClr val="141B2E"/>
                 </a:solidFill>
                 <a:latin typeface="Arial"/>
               </a:rPr>
-              <a:t> Двадцать минут чтения из сцены остаются двадцатью минутами: сорок файлов — это сорок файлов, где бы их ни читали. Меняется одно — чьё окно их держит. Окно роли закрывается вместе с ней, а в сессию возвращается строка ответа и место, которого в сцене не хватило на собственную правку.</a:t>
+              <a:t> Двадцать минут чтения из сцены остаются двадцатью минутами: сорок файлов — это сорок файлов, где бы их ни читали. Меняются двое. Первое — чей контекст их держит: контекст роли закрывается вместе с ней. Второе — куда возвращается список: от роли он приходит сам, в ту сессию, где лежит правка, из второй сессии его переносите вы.</a:t>
             </a:r>
           </a:p>
         </p:txBody>
@@ -4678,7 +4678,7 @@
                 </a:solidFill>
                 <a:latin typeface="Arial"/>
               </a:rPr>
-              <a:t>40</a:t>
+              <a:t>41</a:t>
             </a:r>
           </a:p>
         </p:txBody>
